--- a/analysis/slides/14日間CGM分析.pptx
+++ b/analysis/slides/14日間CGM分析.pptx
@@ -14,9 +14,10 @@
     <p:sldId id="262" r:id="rId8"/>
     <p:sldId id="263" r:id="rId9"/>
     <p:sldId id="264" r:id="rId10"/>
+    <p:sldId id="265" r:id="rId11"/>
   </p:sldIdLst>
   <p:notesMasterIdLst>
-    <p:notesMasterId r:id="rId11"/>
+    <p:notesMasterId r:id="rId12"/>
   </p:notesMasterIdLst>
   <p:sldSz cx="12192000" cy="6858000"/>
   <p:notesSz cx="6858000" cy="12192000"/>
@@ -1615,6 +1616,94 @@
             <a:fld id="{F7021451-1387-4CA6-816F-3879F97B5CBC}" type="slidenum">
               <a:rPr lang="en-US"/>
               <a:t>1</a:t>
+            </a:fld>
+            <a:endParaRPr lang="en-US"/>
+          </a:p>
+        </p:txBody>
+      </p:sp>
+    </p:spTree>
+    <p:extLst>
+      <p:ext uri="{BB962C8B-B14F-4D97-AF65-F5344CB8AC3E}">
+        <p14:creationId xmlns:p14="http://schemas.microsoft.com/office/powerpoint/2010/main" val="1024086991"/>
+      </p:ext>
+    </p:extLst>
+  </p:cSld>
+  <p:clrMapOvr>
+    <a:masterClrMapping/>
+  </p:clrMapOvr>
+</p:notes>
+</file>
+
+<file path=ppt/notesSlides/notesSlide10.xml><?xml version="1.0" encoding="utf-8"?>
+<p:notes xmlns:a="http://schemas.openxmlformats.org/drawingml/2006/main" xmlns:r="http://schemas.openxmlformats.org/officeDocument/2006/relationships" xmlns:p="http://schemas.openxmlformats.org/presentationml/2006/main">
+  <p:cSld>
+    <p:spTree>
+      <p:nvGrpSpPr>
+        <p:cNvPr id="1" name=""/>
+        <p:cNvGrpSpPr/>
+        <p:nvPr/>
+      </p:nvGrpSpPr>
+      <p:grpSpPr>
+        <a:xfrm>
+          <a:off x="0" y="0"/>
+          <a:ext cx="0" cy="0"/>
+          <a:chOff x="0" y="0"/>
+          <a:chExt cx="0" cy="0"/>
+        </a:xfrm>
+      </p:grpSpPr>
+      <p:sp>
+        <p:nvSpPr>
+          <p:cNvPr id="2" name="Slide Image Placeholder 1"/>
+          <p:cNvSpPr>
+            <a:spLocks noGrp="1" noRot="1" noChangeAspect="1"/>
+          </p:cNvSpPr>
+          <p:nvPr>
+            <p:ph type="sldImg"/>
+          </p:nvPr>
+        </p:nvSpPr>
+        <p:spPr/>
+      </p:sp>
+      <p:sp>
+        <p:nvSpPr>
+          <p:cNvPr id="3" name="Notes Placeholder 2"/>
+          <p:cNvSpPr>
+            <a:spLocks noGrp="1"/>
+          </p:cNvSpPr>
+          <p:nvPr>
+            <p:ph type="body" idx="1"/>
+          </p:nvPr>
+        </p:nvSpPr>
+        <p:spPr/>
+        <p:txBody>
+          <a:bodyPr/>
+          <a:lstStyle/>
+          <a:p>
+            <a:r>
+              <a:rPr lang="en-US" dirty="0"/>
+              <a:t/>
+            </a:r>
+            <a:endParaRPr lang="en-US" dirty="0"/>
+          </a:p>
+        </p:txBody>
+      </p:sp>
+      <p:sp>
+        <p:nvSpPr>
+          <p:cNvPr id="4" name="Slide Number Placeholder 3"/>
+          <p:cNvSpPr>
+            <a:spLocks noGrp="1"/>
+          </p:cNvSpPr>
+          <p:nvPr>
+            <p:ph type="sldNum" sz="quarter" idx="10"/>
+          </p:nvPr>
+        </p:nvSpPr>
+        <p:spPr/>
+        <p:txBody>
+          <a:bodyPr/>
+          <a:lstStyle/>
+          <a:p>
+            <a:fld id="{F7021451-1387-4CA6-816F-3879F97B5CBC}" type="slidenum">
+              <a:rPr lang="en-US"/>
+              <a:t>10</a:t>
             </a:fld>
             <a:endParaRPr lang="en-US"/>
           </a:p>
@@ -3119,6 +3208,510 @@
               <a:t>対象：高位脊髄損傷（SCI）車いす陸上選手 1名</a:t>
             </a:r>
             <a:endParaRPr lang="en-US" sz="1050" dirty="0"/>
+          </a:p>
+        </p:txBody>
+      </p:sp>
+    </p:spTree>
+  </p:cSld>
+  <p:clrMapOvr>
+    <a:masterClrMapping/>
+  </p:clrMapOvr>
+</p:sld>
+</file>
+
+<file path=ppt/slides/slide10.xml><?xml version="1.0" encoding="utf-8"?>
+<p:sld xmlns:a="http://schemas.openxmlformats.org/drawingml/2006/main" xmlns:r="http://schemas.openxmlformats.org/officeDocument/2006/relationships" xmlns:p="http://schemas.openxmlformats.org/presentationml/2006/main">
+  <p:cSld name="Slide 10">
+    <p:bg>
+      <p:bgPr>
+        <a:solidFill>
+          <a:srgbClr val="21295C"/>
+        </a:solidFill>
+      </p:bgPr>
+    </p:bg>
+    <p:spTree>
+      <p:nvGrpSpPr>
+        <p:cNvPr id="1" name=""/>
+        <p:cNvGrpSpPr/>
+        <p:nvPr/>
+      </p:nvGrpSpPr>
+      <p:grpSpPr>
+        <a:xfrm>
+          <a:off x="0" y="0"/>
+          <a:ext cx="0" cy="0"/>
+          <a:chOff x="0" y="0"/>
+          <a:chExt cx="0" cy="0"/>
+        </a:xfrm>
+      </p:grpSpPr>
+      <p:sp>
+        <p:nvSpPr>
+          <p:cNvPr id="2" name="Text 0"/>
+          <p:cNvSpPr txBox="1"/>
+          <p:nvPr/>
+        </p:nvSpPr>
+        <p:spPr>
+          <a:xfrm>
+            <a:off x="548640" y="384048"/>
+            <a:ext cx="11091672" cy="310896"/>
+          </a:xfrm>
+          <a:prstGeom prst="rect">
+            <a:avLst/>
+          </a:prstGeom>
+          <a:noFill/>
+          <a:ln/>
+        </p:spPr>
+        <p:txBody>
+          <a:bodyPr wrap="square" rtlCol="0" anchor="ctr"/>
+          <a:lstStyle/>
+          <a:p>
+            <a:pPr indent="0" marL="0">
+              <a:buNone/>
+            </a:pPr>
+            <a:r>
+              <a:rPr lang="en-US" sz="1250" b="1" spc="100" kern="0" dirty="0">
+                <a:solidFill>
+                  <a:srgbClr val="8FB7E0"/>
+                </a:solidFill>
+                <a:latin typeface="Calibri" pitchFamily="34" charset="0"/>
+                <a:ea typeface="Calibri" pitchFamily="34" charset="-122"/>
+                <a:cs typeface="Calibri" pitchFamily="34" charset="-120"/>
+              </a:rPr>
+              <a:t>CONCLUSION</a:t>
+            </a:r>
+            <a:endParaRPr lang="en-US" sz="1250" dirty="0"/>
+          </a:p>
+        </p:txBody>
+      </p:sp>
+      <p:sp>
+        <p:nvSpPr>
+          <p:cNvPr id="3" name="Text 1"/>
+          <p:cNvSpPr txBox="1"/>
+          <p:nvPr/>
+        </p:nvSpPr>
+        <p:spPr>
+          <a:xfrm>
+            <a:off x="548640" y="676656"/>
+            <a:ext cx="11091672" cy="594360"/>
+          </a:xfrm>
+          <a:prstGeom prst="rect">
+            <a:avLst/>
+          </a:prstGeom>
+          <a:noFill/>
+          <a:ln/>
+        </p:spPr>
+        <p:txBody>
+          <a:bodyPr wrap="square" rtlCol="0" anchor="ctr"/>
+          <a:lstStyle/>
+          <a:p>
+            <a:pPr indent="0" marL="0">
+              <a:buNone/>
+            </a:pPr>
+            <a:r>
+              <a:rPr lang="en-US" sz="2600" b="1" dirty="0">
+                <a:solidFill>
+                  <a:srgbClr val="FFFFFF"/>
+                </a:solidFill>
+                <a:latin typeface="Cambria" pitchFamily="34" charset="0"/>
+                <a:ea typeface="Cambria" pitchFamily="34" charset="-122"/>
+                <a:cs typeface="Cambria" pitchFamily="34" charset="-120"/>
+              </a:rPr>
+              <a:t>まとめと推奨アクション</a:t>
+            </a:r>
+            <a:endParaRPr lang="en-US" sz="2600" dirty="0"/>
+          </a:p>
+        </p:txBody>
+      </p:sp>
+      <p:sp>
+        <p:nvSpPr>
+          <p:cNvPr id="4" name="Shape 2"/>
+          <p:cNvSpPr/>
+          <p:nvPr/>
+        </p:nvSpPr>
+        <p:spPr>
+          <a:xfrm>
+            <a:off x="548640" y="1737360"/>
+            <a:ext cx="384048" cy="384048"/>
+          </a:xfrm>
+          <a:prstGeom prst="oval">
+            <a:avLst/>
+          </a:prstGeom>
+          <a:solidFill>
+            <a:srgbClr val="1C7293"/>
+          </a:solidFill>
+          <a:ln/>
+        </p:spPr>
+      </p:sp>
+      <p:sp>
+        <p:nvSpPr>
+          <p:cNvPr id="5" name="Text 3"/>
+          <p:cNvSpPr txBox="1"/>
+          <p:nvPr/>
+        </p:nvSpPr>
+        <p:spPr>
+          <a:xfrm>
+            <a:off x="548640" y="1737360"/>
+            <a:ext cx="384048" cy="384048"/>
+          </a:xfrm>
+          <a:prstGeom prst="rect">
+            <a:avLst/>
+          </a:prstGeom>
+          <a:noFill/>
+          <a:ln/>
+        </p:spPr>
+        <p:txBody>
+          <a:bodyPr wrap="square" lIns="0" tIns="0" rIns="0" bIns="0" rtlCol="0" anchor="ctr"/>
+          <a:lstStyle/>
+          <a:p>
+            <a:pPr algn="ctr" indent="0" marL="0">
+              <a:buNone/>
+            </a:pPr>
+            <a:r>
+              <a:rPr lang="en-US" sz="1400" b="1" dirty="0">
+                <a:solidFill>
+                  <a:srgbClr val="FFFFFF"/>
+                </a:solidFill>
+                <a:latin typeface="Cambria" pitchFamily="34" charset="0"/>
+                <a:ea typeface="Cambria" pitchFamily="34" charset="-122"/>
+                <a:cs typeface="Cambria" pitchFamily="34" charset="-120"/>
+              </a:rPr>
+              <a:t>1</a:t>
+            </a:r>
+            <a:endParaRPr lang="en-US" sz="1400" dirty="0"/>
+          </a:p>
+        </p:txBody>
+      </p:sp>
+      <p:sp>
+        <p:nvSpPr>
+          <p:cNvPr id="6" name="Text 4"/>
+          <p:cNvSpPr txBox="1"/>
+          <p:nvPr/>
+        </p:nvSpPr>
+        <p:spPr>
+          <a:xfrm>
+            <a:off x="1143000" y="1719072"/>
+            <a:ext cx="10332720" cy="777240"/>
+          </a:xfrm>
+          <a:prstGeom prst="rect">
+            <a:avLst/>
+          </a:prstGeom>
+          <a:noFill/>
+          <a:ln/>
+        </p:spPr>
+        <p:txBody>
+          <a:bodyPr wrap="square" lIns="0" tIns="0" rIns="0" bIns="0" rtlCol="0" anchor="ctr"/>
+          <a:lstStyle/>
+          <a:p>
+            <a:pPr indent="0" marL="0">
+              <a:buNone/>
+            </a:pPr>
+            <a:r>
+              <a:rPr lang="en-US" sz="1400" dirty="0">
+                <a:solidFill>
+                  <a:srgbClr val="E8EDF7"/>
+                </a:solidFill>
+                <a:latin typeface="Calibri" pitchFamily="34" charset="0"/>
+                <a:ea typeface="Calibri" pitchFamily="34" charset="-122"/>
+                <a:cs typeface="Calibri" pitchFamily="34" charset="-120"/>
+              </a:rPr>
+              <a:t>14日間・1,432測定点を通じ、低血糖（70mg/dL未満）は一度も検出されなかった（安全面の朗報）</a:t>
+            </a:r>
+            <a:endParaRPr lang="en-US" sz="1400" dirty="0"/>
+          </a:p>
+        </p:txBody>
+      </p:sp>
+      <p:sp>
+        <p:nvSpPr>
+          <p:cNvPr id="7" name="Shape 5"/>
+          <p:cNvSpPr/>
+          <p:nvPr/>
+        </p:nvSpPr>
+        <p:spPr>
+          <a:xfrm>
+            <a:off x="548640" y="2788920"/>
+            <a:ext cx="384048" cy="384048"/>
+          </a:xfrm>
+          <a:prstGeom prst="oval">
+            <a:avLst/>
+          </a:prstGeom>
+          <a:solidFill>
+            <a:srgbClr val="1C7293"/>
+          </a:solidFill>
+          <a:ln/>
+        </p:spPr>
+      </p:sp>
+      <p:sp>
+        <p:nvSpPr>
+          <p:cNvPr id="8" name="Text 6"/>
+          <p:cNvSpPr txBox="1"/>
+          <p:nvPr/>
+        </p:nvSpPr>
+        <p:spPr>
+          <a:xfrm>
+            <a:off x="548640" y="2788920"/>
+            <a:ext cx="384048" cy="384048"/>
+          </a:xfrm>
+          <a:prstGeom prst="rect">
+            <a:avLst/>
+          </a:prstGeom>
+          <a:noFill/>
+          <a:ln/>
+        </p:spPr>
+        <p:txBody>
+          <a:bodyPr wrap="square" lIns="0" tIns="0" rIns="0" bIns="0" rtlCol="0" anchor="ctr"/>
+          <a:lstStyle/>
+          <a:p>
+            <a:pPr algn="ctr" indent="0" marL="0">
+              <a:buNone/>
+            </a:pPr>
+            <a:r>
+              <a:rPr lang="en-US" sz="1400" b="1" dirty="0">
+                <a:solidFill>
+                  <a:srgbClr val="FFFFFF"/>
+                </a:solidFill>
+                <a:latin typeface="Cambria" pitchFamily="34" charset="0"/>
+                <a:ea typeface="Cambria" pitchFamily="34" charset="-122"/>
+                <a:cs typeface="Cambria" pitchFamily="34" charset="-120"/>
+              </a:rPr>
+              <a:t>2</a:t>
+            </a:r>
+            <a:endParaRPr lang="en-US" sz="1400" dirty="0"/>
+          </a:p>
+        </p:txBody>
+      </p:sp>
+      <p:sp>
+        <p:nvSpPr>
+          <p:cNvPr id="9" name="Text 7"/>
+          <p:cNvSpPr txBox="1"/>
+          <p:nvPr/>
+        </p:nvSpPr>
+        <p:spPr>
+          <a:xfrm>
+            <a:off x="1143000" y="2770632"/>
+            <a:ext cx="10332720" cy="777240"/>
+          </a:xfrm>
+          <a:prstGeom prst="rect">
+            <a:avLst/>
+          </a:prstGeom>
+          <a:noFill/>
+          <a:ln/>
+        </p:spPr>
+        <p:txBody>
+          <a:bodyPr wrap="square" lIns="0" tIns="0" rIns="0" bIns="0" rtlCol="0" anchor="ctr"/>
+          <a:lstStyle/>
+          <a:p>
+            <a:pPr indent="0" marL="0">
+              <a:buNone/>
+            </a:pPr>
+            <a:r>
+              <a:rPr lang="en-US" sz="1400" dirty="0">
+                <a:solidFill>
+                  <a:srgbClr val="E8EDF7"/>
+                </a:solidFill>
+                <a:latin typeface="Calibri" pitchFamily="34" charset="0"/>
+                <a:ea typeface="Calibri" pitchFamily="34" charset="-122"/>
+                <a:cs typeface="Calibri" pitchFamily="34" charset="-120"/>
+              </a:rPr>
+              <a:t>DAY5(8/29)14:50頃から血糖ベースラインが持続的に上昇し、以後DAY14まで元の水準に戻らなかった（原因不明）</a:t>
+            </a:r>
+            <a:endParaRPr lang="en-US" sz="1400" dirty="0"/>
+          </a:p>
+        </p:txBody>
+      </p:sp>
+      <p:sp>
+        <p:nvSpPr>
+          <p:cNvPr id="10" name="Shape 8"/>
+          <p:cNvSpPr/>
+          <p:nvPr/>
+        </p:nvSpPr>
+        <p:spPr>
+          <a:xfrm>
+            <a:off x="548640" y="3840480"/>
+            <a:ext cx="384048" cy="384048"/>
+          </a:xfrm>
+          <a:prstGeom prst="oval">
+            <a:avLst/>
+          </a:prstGeom>
+          <a:solidFill>
+            <a:srgbClr val="1C7293"/>
+          </a:solidFill>
+          <a:ln/>
+        </p:spPr>
+      </p:sp>
+      <p:sp>
+        <p:nvSpPr>
+          <p:cNvPr id="11" name="Text 9"/>
+          <p:cNvSpPr txBox="1"/>
+          <p:nvPr/>
+        </p:nvSpPr>
+        <p:spPr>
+          <a:xfrm>
+            <a:off x="548640" y="3840480"/>
+            <a:ext cx="384048" cy="384048"/>
+          </a:xfrm>
+          <a:prstGeom prst="rect">
+            <a:avLst/>
+          </a:prstGeom>
+          <a:noFill/>
+          <a:ln/>
+        </p:spPr>
+        <p:txBody>
+          <a:bodyPr wrap="square" lIns="0" tIns="0" rIns="0" bIns="0" rtlCol="0" anchor="ctr"/>
+          <a:lstStyle/>
+          <a:p>
+            <a:pPr algn="ctr" indent="0" marL="0">
+              <a:buNone/>
+            </a:pPr>
+            <a:r>
+              <a:rPr lang="en-US" sz="1400" b="1" dirty="0">
+                <a:solidFill>
+                  <a:srgbClr val="FFFFFF"/>
+                </a:solidFill>
+                <a:latin typeface="Cambria" pitchFamily="34" charset="0"/>
+                <a:ea typeface="Cambria" pitchFamily="34" charset="-122"/>
+                <a:cs typeface="Cambria" pitchFamily="34" charset="-120"/>
+              </a:rPr>
+              <a:t>3</a:t>
+            </a:r>
+            <a:endParaRPr lang="en-US" sz="1400" dirty="0"/>
+          </a:p>
+        </p:txBody>
+      </p:sp>
+      <p:sp>
+        <p:nvSpPr>
+          <p:cNvPr id="12" name="Text 10"/>
+          <p:cNvSpPr txBox="1"/>
+          <p:nvPr/>
+        </p:nvSpPr>
+        <p:spPr>
+          <a:xfrm>
+            <a:off x="1143000" y="3822192"/>
+            <a:ext cx="10332720" cy="777240"/>
+          </a:xfrm>
+          <a:prstGeom prst="rect">
+            <a:avLst/>
+          </a:prstGeom>
+          <a:noFill/>
+          <a:ln/>
+        </p:spPr>
+        <p:txBody>
+          <a:bodyPr wrap="square" lIns="0" tIns="0" rIns="0" bIns="0" rtlCol="0" anchor="ctr"/>
+          <a:lstStyle/>
+          <a:p>
+            <a:pPr indent="0" marL="0">
+              <a:buNone/>
+            </a:pPr>
+            <a:r>
+              <a:rPr lang="en-US" sz="1400" dirty="0">
+                <a:solidFill>
+                  <a:srgbClr val="E8EDF7"/>
+                </a:solidFill>
+                <a:latin typeface="Calibri" pitchFamily="34" charset="0"/>
+                <a:ea typeface="Calibri" pitchFamily="34" charset="-122"/>
+                <a:cs typeface="Calibri" pitchFamily="34" charset="-120"/>
+              </a:rPr>
+              <a:t>この結果、①固形vsスムージー・②タイミングの比較結論は参考値、③糖質量の比較（最重要結果）は結論を維持できる</a:t>
+            </a:r>
+            <a:endParaRPr lang="en-US" sz="1400" dirty="0"/>
+          </a:p>
+        </p:txBody>
+      </p:sp>
+      <p:sp>
+        <p:nvSpPr>
+          <p:cNvPr id="13" name="Shape 11"/>
+          <p:cNvSpPr/>
+          <p:nvPr/>
+        </p:nvSpPr>
+        <p:spPr>
+          <a:xfrm>
+            <a:off x="548640" y="5074920"/>
+            <a:ext cx="11091672" cy="1188720"/>
+          </a:xfrm>
+          <a:prstGeom prst="roundRect">
+            <a:avLst>
+              <a:gd name="adj" fmla="val 7692"/>
+            </a:avLst>
+          </a:prstGeom>
+          <a:solidFill>
+            <a:srgbClr val="1A2350"/>
+          </a:solidFill>
+          <a:ln/>
+        </p:spPr>
+      </p:sp>
+      <p:sp>
+        <p:nvSpPr>
+          <p:cNvPr id="14" name="Text 12"/>
+          <p:cNvSpPr txBox="1"/>
+          <p:nvPr/>
+        </p:nvSpPr>
+        <p:spPr>
+          <a:xfrm>
+            <a:off x="822960" y="5212080"/>
+            <a:ext cx="10543032" cy="914400"/>
+          </a:xfrm>
+          <a:prstGeom prst="rect">
+            <a:avLst/>
+          </a:prstGeom>
+          <a:noFill/>
+          <a:ln/>
+        </p:spPr>
+        <p:txBody>
+          <a:bodyPr wrap="square" lIns="0" tIns="0" rIns="0" bIns="0" rtlCol="0" anchor="ctr"/>
+          <a:lstStyle/>
+          <a:p>
+            <a:pPr indent="0" marL="0">
+              <a:buNone/>
+            </a:pPr>
+            <a:r>
+              <a:rPr lang="en-US" sz="1300" b="1" dirty="0">
+                <a:solidFill>
+                  <a:srgbClr val="E8EDF7"/>
+                </a:solidFill>
+                <a:latin typeface="Calibri" pitchFamily="34" charset="0"/>
+                <a:ea typeface="Calibri" pitchFamily="34" charset="-122"/>
+                <a:cs typeface="Calibri" pitchFamily="34" charset="-120"/>
+              </a:rPr>
+              <a:t>推奨アクション：選手・スタッフに「8/29 14:30〜15:30頃、普段と違うこと（補食・体調の変化・ストレスの多い出来事）がなかったか」を確認する。コスト0・即実施可能で、原因が判明すれば①②の結論を再評価できる。</a:t>
+            </a:r>
+            <a:endParaRPr lang="en-US" sz="1300" dirty="0"/>
+          </a:p>
+        </p:txBody>
+      </p:sp>
+      <p:sp>
+        <p:nvSpPr>
+          <p:cNvPr id="15" name="Text 13"/>
+          <p:cNvSpPr/>
+          <p:nvPr/>
+        </p:nvSpPr>
+        <p:spPr>
+          <a:xfrm>
+            <a:off x="548640" y="6492240"/>
+            <a:ext cx="11091672" cy="256032"/>
+          </a:xfrm>
+          <a:prstGeom prst="rect">
+            <a:avLst/>
+          </a:prstGeom>
+          <a:noFill/>
+          <a:ln/>
+        </p:spPr>
+        <p:txBody>
+          <a:bodyPr wrap="square" rtlCol="0" anchor="ctr"/>
+          <a:lstStyle/>
+          <a:p>
+            <a:pPr algn="l" indent="0" marL="0">
+              <a:buNone/>
+            </a:pPr>
+            <a:r>
+              <a:rPr lang="en-US" sz="950" dirty="0">
+                <a:solidFill>
+                  <a:srgbClr val="9AA6C4"/>
+                </a:solidFill>
+                <a:latin typeface="Calibri" pitchFamily="34" charset="0"/>
+                <a:ea typeface="Calibri" pitchFamily="34" charset="-122"/>
+                <a:cs typeface="Calibri" pitchFamily="34" charset="-120"/>
+              </a:rPr>
+              <a:t>データ出典：14日間_for_AI.xlsx（FreeStyleリブレ連続血糖データ）／condition_app_2026-08-25_2026-09-07.xlsx</a:t>
+            </a:r>
+            <a:endParaRPr lang="en-US" sz="950" dirty="0"/>
           </a:p>
         </p:txBody>
       </p:sp>
@@ -6972,7 +7565,7 @@
     <p:bg>
       <p:bgPr>
         <a:solidFill>
-          <a:srgbClr val="21295C"/>
+          <a:srgbClr val="FFFFFF"/>
         </a:solidFill>
       </p:bgPr>
     </p:bg>
@@ -7017,13 +7610,13 @@
             <a:r>
               <a:rPr lang="en-US" sz="1250" b="1" spc="100" kern="0" dirty="0">
                 <a:solidFill>
-                  <a:srgbClr val="8FB7E0"/>
+                  <a:srgbClr val="1C7293"/>
                 </a:solidFill>
                 <a:latin typeface="Calibri" pitchFamily="34" charset="0"/>
                 <a:ea typeface="Calibri" pitchFamily="34" charset="-122"/>
                 <a:cs typeface="Calibri" pitchFamily="34" charset="-120"/>
               </a:rPr>
-              <a:t>CONCLUSION</a:t>
+              <a:t>DISCUSSION</a:t>
             </a:r>
             <a:endParaRPr lang="en-US" sz="1250" dirty="0"/>
           </a:p>
@@ -7056,13 +7649,13 @@
             <a:r>
               <a:rPr lang="en-US" sz="2600" b="1" dirty="0">
                 <a:solidFill>
-                  <a:srgbClr val="FFFFFF"/>
+                  <a:srgbClr val="21295C"/>
                 </a:solidFill>
                 <a:latin typeface="Cambria" pitchFamily="34" charset="0"/>
                 <a:ea typeface="Cambria" pitchFamily="34" charset="-122"/>
                 <a:cs typeface="Cambria" pitchFamily="34" charset="-120"/>
               </a:rPr>
-              <a:t>まとめと推奨アクション</a:t>
+              <a:t>なぜこの相関が起きたのか：仮説とエビデンス</a:t>
             </a:r>
             <a:endParaRPr lang="en-US" sz="2600" dirty="0"/>
           </a:p>
@@ -7076,28 +7669,155 @@
         </p:nvSpPr>
         <p:spPr>
           <a:xfrm>
-            <a:off x="548640" y="1737360"/>
-            <a:ext cx="384048" cy="384048"/>
+            <a:off x="548640" y="1417320"/>
+            <a:ext cx="11091672" cy="1097280"/>
+          </a:xfrm>
+          <a:prstGeom prst="roundRect">
+            <a:avLst>
+              <a:gd name="adj" fmla="val 8333"/>
+            </a:avLst>
+          </a:prstGeom>
+          <a:solidFill>
+            <a:srgbClr val="FDF3E2"/>
+          </a:solidFill>
+          <a:ln w="12700">
+            <a:solidFill>
+              <a:srgbClr val="EDA100"/>
+            </a:solidFill>
+            <a:prstDash val="solid"/>
+          </a:ln>
+        </p:spPr>
+      </p:sp>
+      <p:sp>
+        <p:nvSpPr>
+          <p:cNvPr id="5" name="Text 3"/>
+          <p:cNvSpPr txBox="1"/>
+          <p:nvPr/>
+        </p:nvSpPr>
+        <p:spPr>
+          <a:xfrm>
+            <a:off x="822960" y="1536192"/>
+            <a:ext cx="10543032" cy="274320"/>
+          </a:xfrm>
+          <a:prstGeom prst="rect">
+            <a:avLst/>
+          </a:prstGeom>
+          <a:noFill/>
+          <a:ln/>
+        </p:spPr>
+        <p:txBody>
+          <a:bodyPr wrap="square" lIns="0" tIns="0" rIns="0" bIns="0" rtlCol="0" anchor="ctr"/>
+          <a:lstStyle/>
+          <a:p>
+            <a:pPr indent="0" marL="0">
+              <a:buNone/>
+            </a:pPr>
+            <a:r>
+              <a:rPr lang="en-US" sz="1300" b="1" dirty="0">
+                <a:solidFill>
+                  <a:srgbClr val="6B4B00"/>
+                </a:solidFill>
+                <a:latin typeface="Calibri" pitchFamily="34" charset="0"/>
+                <a:ea typeface="Calibri" pitchFamily="34" charset="-122"/>
+                <a:cs typeface="Calibri" pitchFamily="34" charset="-120"/>
+              </a:rPr>
+              <a:t>⚠ 最優先で疑うべき解釈：交絡（見せかけの相関）</a:t>
+            </a:r>
+            <a:endParaRPr lang="en-US" sz="1300" dirty="0"/>
+          </a:p>
+        </p:txBody>
+      </p:sp>
+      <p:sp>
+        <p:nvSpPr>
+          <p:cNvPr id="6" name="Text 4"/>
+          <p:cNvSpPr txBox="1"/>
+          <p:nvPr/>
+        </p:nvSpPr>
+        <p:spPr>
+          <a:xfrm>
+            <a:off x="822960" y="1828800"/>
+            <a:ext cx="10543032" cy="594360"/>
+          </a:xfrm>
+          <a:prstGeom prst="rect">
+            <a:avLst/>
+          </a:prstGeom>
+          <a:noFill/>
+          <a:ln/>
+        </p:spPr>
+        <p:txBody>
+          <a:bodyPr wrap="square" lIns="0" tIns="0" rIns="0" bIns="0" rtlCol="0" anchor="ctr"/>
+          <a:lstStyle/>
+          <a:p>
+            <a:pPr indent="0" marL="0">
+              <a:buNone/>
+            </a:pPr>
+            <a:r>
+              <a:rPr lang="en-US" sz="1100" dirty="0">
+                <a:solidFill>
+                  <a:srgbClr val="6B4B00"/>
+                </a:solidFill>
+                <a:latin typeface="Calibri" pitchFamily="34" charset="0"/>
+                <a:ea typeface="Calibri" pitchFamily="34" charset="-122"/>
+                <a:cs typeface="Calibri" pitchFamily="34" charset="-120"/>
+              </a:rPr>
+              <a:t>DAY5以降、血糖変動の拡大とコンディション低下が同時進行。体調不良・疲労など共通の要因が両方を引き起こしているだけの可能性が高く、r=-0.41・-0.48程度の相関はこれだけで説明できる。</a:t>
+            </a:r>
+            <a:endParaRPr lang="en-US" sz="1100" dirty="0"/>
+          </a:p>
+        </p:txBody>
+      </p:sp>
+      <p:sp>
+        <p:nvSpPr>
+          <p:cNvPr id="7" name="Shape 5"/>
+          <p:cNvSpPr/>
+          <p:nvPr/>
+        </p:nvSpPr>
+        <p:spPr>
+          <a:xfrm>
+            <a:off x="548640" y="2697480"/>
+            <a:ext cx="5408676" cy="1417320"/>
+          </a:xfrm>
+          <a:prstGeom prst="roundRect">
+            <a:avLst>
+              <a:gd name="adj" fmla="val 5161"/>
+            </a:avLst>
+          </a:prstGeom>
+          <a:solidFill>
+            <a:srgbClr val="F4F7F9"/>
+          </a:solidFill>
+          <a:ln/>
+        </p:spPr>
+      </p:sp>
+      <p:sp>
+        <p:nvSpPr>
+          <p:cNvPr id="8" name="Shape 6"/>
+          <p:cNvSpPr/>
+          <p:nvPr/>
+        </p:nvSpPr>
+        <p:spPr>
+          <a:xfrm>
+            <a:off x="749808" y="2880360"/>
+            <a:ext cx="329184" cy="329184"/>
           </a:xfrm>
           <a:prstGeom prst="oval">
             <a:avLst/>
           </a:prstGeom>
           <a:solidFill>
-            <a:srgbClr val="1C7293"/>
+            <a:srgbClr val="2A78D6"/>
           </a:solidFill>
           <a:ln/>
         </p:spPr>
       </p:sp>
       <p:sp>
         <p:nvSpPr>
-          <p:cNvPr id="5" name="Text 3"/>
-          <p:cNvSpPr txBox="1"/>
-          <p:nvPr/>
-        </p:nvSpPr>
-        <p:spPr>
-          <a:xfrm>
-            <a:off x="548640" y="1737360"/>
-            <a:ext cx="384048" cy="384048"/>
+          <p:cNvPr id="9" name="Text 7"/>
+          <p:cNvSpPr txBox="1"/>
+          <p:nvPr/>
+        </p:nvSpPr>
+        <p:spPr>
+          <a:xfrm>
+            <a:off x="749808" y="2880360"/>
+            <a:ext cx="329184" cy="329184"/>
           </a:xfrm>
           <a:prstGeom prst="rect">
             <a:avLst/>
@@ -7113,7 +7833,7 @@
               <a:buNone/>
             </a:pPr>
             <a:r>
-              <a:rPr lang="en-US" sz="1400" b="1" dirty="0">
+              <a:rPr lang="en-US" sz="1200" b="1" dirty="0">
                 <a:solidFill>
                   <a:srgbClr val="FFFFFF"/>
                 </a:solidFill>
@@ -7121,22 +7841,22 @@
                 <a:ea typeface="Cambria" pitchFamily="34" charset="-122"/>
                 <a:cs typeface="Cambria" pitchFamily="34" charset="-120"/>
               </a:rPr>
-              <a:t>1</a:t>
-            </a:r>
-            <a:endParaRPr lang="en-US" sz="1400" dirty="0"/>
-          </a:p>
-        </p:txBody>
-      </p:sp>
-      <p:sp>
-        <p:nvSpPr>
-          <p:cNvPr id="6" name="Text 4"/>
-          <p:cNvSpPr txBox="1"/>
-          <p:nvPr/>
-        </p:nvSpPr>
-        <p:spPr>
-          <a:xfrm>
-            <a:off x="1143000" y="1719072"/>
-            <a:ext cx="10332720" cy="777240"/>
+              <a:t>①</a:t>
+            </a:r>
+            <a:endParaRPr lang="en-US" sz="1200" dirty="0"/>
+          </a:p>
+        </p:txBody>
+      </p:sp>
+      <p:sp>
+        <p:nvSpPr>
+          <p:cNvPr id="10" name="Text 8"/>
+          <p:cNvSpPr txBox="1"/>
+          <p:nvPr/>
+        </p:nvSpPr>
+        <p:spPr>
+          <a:xfrm>
+            <a:off x="1207008" y="2862072"/>
+            <a:ext cx="4539996" cy="310896"/>
           </a:xfrm>
           <a:prstGeom prst="rect">
             <a:avLst/>
@@ -7152,50 +7872,111 @@
               <a:buNone/>
             </a:pPr>
             <a:r>
-              <a:rPr lang="en-US" sz="1400" dirty="0">
-                <a:solidFill>
-                  <a:srgbClr val="E8EDF7"/>
+              <a:rPr lang="en-US" sz="1250" b="1" dirty="0">
+                <a:solidFill>
+                  <a:srgbClr val="21295C"/>
                 </a:solidFill>
                 <a:latin typeface="Calibri" pitchFamily="34" charset="0"/>
                 <a:ea typeface="Calibri" pitchFamily="34" charset="-122"/>
                 <a:cs typeface="Calibri" pitchFamily="34" charset="-120"/>
               </a:rPr>
-              <a:t>14日間・1,432測定点を通じ、低血糖（70mg/dL未満）は一度も検出されなかった（安全面の朗報）</a:t>
-            </a:r>
-            <a:endParaRPr lang="en-US" sz="1400" dirty="0"/>
-          </a:p>
-        </p:txBody>
-      </p:sp>
-      <p:sp>
-        <p:nvSpPr>
-          <p:cNvPr id="7" name="Shape 5"/>
+              <a:t>睡眠の質への影響</a:t>
+            </a:r>
+            <a:endParaRPr lang="en-US" sz="1250" dirty="0"/>
+          </a:p>
+        </p:txBody>
+      </p:sp>
+      <p:sp>
+        <p:nvSpPr>
+          <p:cNvPr id="11" name="Text 9"/>
+          <p:cNvSpPr txBox="1"/>
+          <p:nvPr/>
+        </p:nvSpPr>
+        <p:spPr>
+          <a:xfrm>
+            <a:off x="749808" y="3264408"/>
+            <a:ext cx="4997196" cy="804672"/>
+          </a:xfrm>
+          <a:prstGeom prst="rect">
+            <a:avLst/>
+          </a:prstGeom>
+          <a:noFill/>
+          <a:ln/>
+        </p:spPr>
+        <p:txBody>
+          <a:bodyPr wrap="square" lIns="0" tIns="0" rIns="0" bIns="0" rtlCol="0" anchor="ctr"/>
+          <a:lstStyle/>
+          <a:p>
+            <a:pPr indent="0" marL="0">
+              <a:buNone/>
+            </a:pPr>
+            <a:r>
+              <a:rPr lang="en-US" sz="1050" dirty="0">
+                <a:solidFill>
+                  <a:srgbClr val="5C6570"/>
+                </a:solidFill>
+                <a:latin typeface="Calibri" pitchFamily="34" charset="0"/>
+                <a:ea typeface="Calibri" pitchFamily="34" charset="-122"/>
+                <a:cs typeface="Calibri" pitchFamily="34" charset="-120"/>
+              </a:rPr>
+              <a:t>夜間の急な血糖変動が中途覚醒を誘発し、翌朝のコンディションを下げる可能性（CGM併用の睡眠研究で報告あり）</a:t>
+            </a:r>
+            <a:endParaRPr lang="en-US" sz="1050" dirty="0"/>
+          </a:p>
+        </p:txBody>
+      </p:sp>
+      <p:sp>
+        <p:nvSpPr>
+          <p:cNvPr id="12" name="Shape 10"/>
           <p:cNvSpPr/>
           <p:nvPr/>
         </p:nvSpPr>
         <p:spPr>
           <a:xfrm>
-            <a:off x="548640" y="2788920"/>
-            <a:ext cx="384048" cy="384048"/>
+            <a:off x="6231636" y="2697480"/>
+            <a:ext cx="5408676" cy="1417320"/>
+          </a:xfrm>
+          <a:prstGeom prst="roundRect">
+            <a:avLst>
+              <a:gd name="adj" fmla="val 5161"/>
+            </a:avLst>
+          </a:prstGeom>
+          <a:solidFill>
+            <a:srgbClr val="F4F7F9"/>
+          </a:solidFill>
+          <a:ln/>
+        </p:spPr>
+      </p:sp>
+      <p:sp>
+        <p:nvSpPr>
+          <p:cNvPr id="13" name="Shape 11"/>
+          <p:cNvSpPr/>
+          <p:nvPr/>
+        </p:nvSpPr>
+        <p:spPr>
+          <a:xfrm>
+            <a:off x="6432804" y="2880360"/>
+            <a:ext cx="329184" cy="329184"/>
           </a:xfrm>
           <a:prstGeom prst="oval">
             <a:avLst/>
           </a:prstGeom>
           <a:solidFill>
-            <a:srgbClr val="1C7293"/>
+            <a:srgbClr val="EB6834"/>
           </a:solidFill>
           <a:ln/>
         </p:spPr>
       </p:sp>
       <p:sp>
         <p:nvSpPr>
-          <p:cNvPr id="8" name="Text 6"/>
-          <p:cNvSpPr txBox="1"/>
-          <p:nvPr/>
-        </p:nvSpPr>
-        <p:spPr>
-          <a:xfrm>
-            <a:off x="548640" y="2788920"/>
-            <a:ext cx="384048" cy="384048"/>
+          <p:cNvPr id="14" name="Text 12"/>
+          <p:cNvSpPr txBox="1"/>
+          <p:nvPr/>
+        </p:nvSpPr>
+        <p:spPr>
+          <a:xfrm>
+            <a:off x="6432804" y="2880360"/>
+            <a:ext cx="329184" cy="329184"/>
           </a:xfrm>
           <a:prstGeom prst="rect">
             <a:avLst/>
@@ -7211,7 +7992,7 @@
               <a:buNone/>
             </a:pPr>
             <a:r>
-              <a:rPr lang="en-US" sz="1400" b="1" dirty="0">
+              <a:rPr lang="en-US" sz="1200" b="1" dirty="0">
                 <a:solidFill>
                   <a:srgbClr val="FFFFFF"/>
                 </a:solidFill>
@@ -7219,22 +8000,22 @@
                 <a:ea typeface="Cambria" pitchFamily="34" charset="-122"/>
                 <a:cs typeface="Cambria" pitchFamily="34" charset="-120"/>
               </a:rPr>
-              <a:t>2</a:t>
-            </a:r>
-            <a:endParaRPr lang="en-US" sz="1400" dirty="0"/>
-          </a:p>
-        </p:txBody>
-      </p:sp>
-      <p:sp>
-        <p:nvSpPr>
-          <p:cNvPr id="9" name="Text 7"/>
-          <p:cNvSpPr txBox="1"/>
-          <p:nvPr/>
-        </p:nvSpPr>
-        <p:spPr>
-          <a:xfrm>
-            <a:off x="1143000" y="2770632"/>
-            <a:ext cx="10332720" cy="777240"/>
+              <a:t>②</a:t>
+            </a:r>
+            <a:endParaRPr lang="en-US" sz="1200" dirty="0"/>
+          </a:p>
+        </p:txBody>
+      </p:sp>
+      <p:sp>
+        <p:nvSpPr>
+          <p:cNvPr id="15" name="Text 13"/>
+          <p:cNvSpPr txBox="1"/>
+          <p:nvPr/>
+        </p:nvSpPr>
+        <p:spPr>
+          <a:xfrm>
+            <a:off x="6890004" y="2862072"/>
+            <a:ext cx="4539996" cy="310896"/>
           </a:xfrm>
           <a:prstGeom prst="rect">
             <a:avLst/>
@@ -7250,50 +8031,111 @@
               <a:buNone/>
             </a:pPr>
             <a:r>
-              <a:rPr lang="en-US" sz="1400" dirty="0">
-                <a:solidFill>
-                  <a:srgbClr val="E8EDF7"/>
+              <a:rPr lang="en-US" sz="1250" b="1" dirty="0">
+                <a:solidFill>
+                  <a:srgbClr val="21295C"/>
                 </a:solidFill>
                 <a:latin typeface="Calibri" pitchFamily="34" charset="0"/>
                 <a:ea typeface="Calibri" pitchFamily="34" charset="-122"/>
                 <a:cs typeface="Calibri" pitchFamily="34" charset="-120"/>
               </a:rPr>
-              <a:t>DAY5(8/29)14:50頃から血糖ベースラインが持続的に上昇し、以後DAY14まで元の水準に戻らなかった（原因不明）</a:t>
-            </a:r>
-            <a:endParaRPr lang="en-US" sz="1400" dirty="0"/>
-          </a:p>
-        </p:txBody>
-      </p:sp>
-      <p:sp>
-        <p:nvSpPr>
-          <p:cNvPr id="10" name="Shape 8"/>
+              <a:t>自律神経系への負荷</a:t>
+            </a:r>
+            <a:endParaRPr lang="en-US" sz="1250" dirty="0"/>
+          </a:p>
+        </p:txBody>
+      </p:sp>
+      <p:sp>
+        <p:nvSpPr>
+          <p:cNvPr id="16" name="Text 14"/>
+          <p:cNvSpPr txBox="1"/>
+          <p:nvPr/>
+        </p:nvSpPr>
+        <p:spPr>
+          <a:xfrm>
+            <a:off x="6432804" y="3264408"/>
+            <a:ext cx="4997196" cy="804672"/>
+          </a:xfrm>
+          <a:prstGeom prst="rect">
+            <a:avLst/>
+          </a:prstGeom>
+          <a:noFill/>
+          <a:ln/>
+        </p:spPr>
+        <p:txBody>
+          <a:bodyPr wrap="square" lIns="0" tIns="0" rIns="0" bIns="0" rtlCol="0" anchor="ctr"/>
+          <a:lstStyle/>
+          <a:p>
+            <a:pPr indent="0" marL="0">
+              <a:buNone/>
+            </a:pPr>
+            <a:r>
+              <a:rPr lang="en-US" sz="1050" dirty="0">
+                <a:solidFill>
+                  <a:srgbClr val="5C6570"/>
+                </a:solidFill>
+                <a:latin typeface="Calibri" pitchFamily="34" charset="0"/>
+                <a:ea typeface="Calibri" pitchFamily="34" charset="-122"/>
+                <a:cs typeface="Calibri" pitchFamily="34" charset="-120"/>
+              </a:rPr>
+              <a:t>血糖を戻すためのホルモン動員（グルカゴン等）が交感神経を優位にし、夜間の回復を妨げる可能性。SCIでは自律神経調節自体も脆弱</a:t>
+            </a:r>
+            <a:endParaRPr lang="en-US" sz="1050" dirty="0"/>
+          </a:p>
+        </p:txBody>
+      </p:sp>
+      <p:sp>
+        <p:nvSpPr>
+          <p:cNvPr id="17" name="Shape 15"/>
           <p:cNvSpPr/>
           <p:nvPr/>
         </p:nvSpPr>
         <p:spPr>
           <a:xfrm>
-            <a:off x="548640" y="3840480"/>
-            <a:ext cx="384048" cy="384048"/>
+            <a:off x="548640" y="4343400"/>
+            <a:ext cx="5408676" cy="1417320"/>
+          </a:xfrm>
+          <a:prstGeom prst="roundRect">
+            <a:avLst>
+              <a:gd name="adj" fmla="val 5161"/>
+            </a:avLst>
+          </a:prstGeom>
+          <a:solidFill>
+            <a:srgbClr val="F4F7F9"/>
+          </a:solidFill>
+          <a:ln/>
+        </p:spPr>
+      </p:sp>
+      <p:sp>
+        <p:nvSpPr>
+          <p:cNvPr id="18" name="Shape 16"/>
+          <p:cNvSpPr/>
+          <p:nvPr/>
+        </p:nvSpPr>
+        <p:spPr>
+          <a:xfrm>
+            <a:off x="749808" y="4526280"/>
+            <a:ext cx="329184" cy="329184"/>
           </a:xfrm>
           <a:prstGeom prst="oval">
             <a:avLst/>
           </a:prstGeom>
           <a:solidFill>
-            <a:srgbClr val="1C7293"/>
+            <a:srgbClr val="1BAF7A"/>
           </a:solidFill>
           <a:ln/>
         </p:spPr>
       </p:sp>
       <p:sp>
         <p:nvSpPr>
-          <p:cNvPr id="11" name="Text 9"/>
-          <p:cNvSpPr txBox="1"/>
-          <p:nvPr/>
-        </p:nvSpPr>
-        <p:spPr>
-          <a:xfrm>
-            <a:off x="548640" y="3840480"/>
-            <a:ext cx="384048" cy="384048"/>
+          <p:cNvPr id="19" name="Text 17"/>
+          <p:cNvSpPr txBox="1"/>
+          <p:nvPr/>
+        </p:nvSpPr>
+        <p:spPr>
+          <a:xfrm>
+            <a:off x="749808" y="4526280"/>
+            <a:ext cx="329184" cy="329184"/>
           </a:xfrm>
           <a:prstGeom prst="rect">
             <a:avLst/>
@@ -7309,7 +8151,7 @@
               <a:buNone/>
             </a:pPr>
             <a:r>
-              <a:rPr lang="en-US" sz="1400" b="1" dirty="0">
+              <a:rPr lang="en-US" sz="1200" b="1" dirty="0">
                 <a:solidFill>
                   <a:srgbClr val="FFFFFF"/>
                 </a:solidFill>
@@ -7317,22 +8159,22 @@
                 <a:ea typeface="Cambria" pitchFamily="34" charset="-122"/>
                 <a:cs typeface="Cambria" pitchFamily="34" charset="-120"/>
               </a:rPr>
-              <a:t>3</a:t>
-            </a:r>
-            <a:endParaRPr lang="en-US" sz="1400" dirty="0"/>
-          </a:p>
-        </p:txBody>
-      </p:sp>
-      <p:sp>
-        <p:nvSpPr>
-          <p:cNvPr id="12" name="Text 10"/>
-          <p:cNvSpPr txBox="1"/>
-          <p:nvPr/>
-        </p:nvSpPr>
-        <p:spPr>
-          <a:xfrm>
-            <a:off x="1143000" y="3822192"/>
-            <a:ext cx="10332720" cy="777240"/>
+              <a:t>③</a:t>
+            </a:r>
+            <a:endParaRPr lang="en-US" sz="1200" dirty="0"/>
+          </a:p>
+        </p:txBody>
+      </p:sp>
+      <p:sp>
+        <p:nvSpPr>
+          <p:cNvPr id="20" name="Text 18"/>
+          <p:cNvSpPr txBox="1"/>
+          <p:nvPr/>
+        </p:nvSpPr>
+        <p:spPr>
+          <a:xfrm>
+            <a:off x="1207008" y="4507992"/>
+            <a:ext cx="4539996" cy="310896"/>
           </a:xfrm>
           <a:prstGeom prst="rect">
             <a:avLst/>
@@ -7348,52 +8190,30 @@
               <a:buNone/>
             </a:pPr>
             <a:r>
-              <a:rPr lang="en-US" sz="1400" dirty="0">
-                <a:solidFill>
-                  <a:srgbClr val="E8EDF7"/>
+              <a:rPr lang="en-US" sz="1250" b="1" dirty="0">
+                <a:solidFill>
+                  <a:srgbClr val="21295C"/>
                 </a:solidFill>
                 <a:latin typeface="Calibri" pitchFamily="34" charset="0"/>
                 <a:ea typeface="Calibri" pitchFamily="34" charset="-122"/>
                 <a:cs typeface="Calibri" pitchFamily="34" charset="-120"/>
               </a:rPr>
-              <a:t>この結果、①固形vsスムージー・②タイミングの比較結論は参考値、③糖質量の比較（最重要結果）は結論を維持できる</a:t>
-            </a:r>
-            <a:endParaRPr lang="en-US" sz="1400" dirty="0"/>
-          </a:p>
-        </p:txBody>
-      </p:sp>
-      <p:sp>
-        <p:nvSpPr>
-          <p:cNvPr id="13" name="Shape 11"/>
-          <p:cNvSpPr/>
-          <p:nvPr/>
-        </p:nvSpPr>
-        <p:spPr>
-          <a:xfrm>
-            <a:off x="548640" y="5074920"/>
-            <a:ext cx="11091672" cy="1188720"/>
-          </a:xfrm>
-          <a:prstGeom prst="roundRect">
-            <a:avLst>
-              <a:gd name="adj" fmla="val 7692"/>
-            </a:avLst>
-          </a:prstGeom>
-          <a:solidFill>
-            <a:srgbClr val="1A2350"/>
-          </a:solidFill>
-          <a:ln/>
-        </p:spPr>
-      </p:sp>
-      <p:sp>
-        <p:nvSpPr>
-          <p:cNvPr id="14" name="Text 12"/>
-          <p:cNvSpPr txBox="1"/>
-          <p:nvPr/>
-        </p:nvSpPr>
-        <p:spPr>
-          <a:xfrm>
-            <a:off x="822960" y="5212080"/>
-            <a:ext cx="10543032" cy="914400"/>
+              <a:t>酸化ストレス</a:t>
+            </a:r>
+            <a:endParaRPr lang="en-US" sz="1250" dirty="0"/>
+          </a:p>
+        </p:txBody>
+      </p:sp>
+      <p:sp>
+        <p:nvSpPr>
+          <p:cNvPr id="21" name="Text 19"/>
+          <p:cNvSpPr txBox="1"/>
+          <p:nvPr/>
+        </p:nvSpPr>
+        <p:spPr>
+          <a:xfrm>
+            <a:off x="749808" y="4910328"/>
+            <a:ext cx="4997196" cy="804672"/>
           </a:xfrm>
           <a:prstGeom prst="rect">
             <a:avLst/>
@@ -7409,56 +8229,242 @@
               <a:buNone/>
             </a:pPr>
             <a:r>
-              <a:rPr lang="en-US" sz="1300" b="1" dirty="0">
-                <a:solidFill>
-                  <a:srgbClr val="E8EDF7"/>
+              <a:rPr lang="en-US" sz="1050" dirty="0">
+                <a:solidFill>
+                  <a:srgbClr val="5C6570"/>
                 </a:solidFill>
                 <a:latin typeface="Calibri" pitchFamily="34" charset="0"/>
                 <a:ea typeface="Calibri" pitchFamily="34" charset="-122"/>
                 <a:cs typeface="Calibri" pitchFamily="34" charset="-120"/>
               </a:rPr>
-              <a:t>推奨アクション：選手・スタッフに「8/29 14:30〜15:30頃、普段と違うこと（補食・体調の変化・ストレスの多い出来事）がなかったか」を確認する。コスト0・即実施可能で、原因が判明すれば①②の結論を再評価できる。</a:t>
-            </a:r>
-            <a:endParaRPr lang="en-US" sz="1300" dirty="0"/>
-          </a:p>
-        </p:txBody>
-      </p:sp>
-      <p:sp>
-        <p:nvSpPr>
-          <p:cNvPr id="15" name="Text 13"/>
+              <a:t>平均血糖が同じでも変動幅が大きいほど酸化ストレスが増えることが糖尿病領域で報告されている（Monnierら）。慢性的な疲労感につながりうる経路</a:t>
+            </a:r>
+            <a:endParaRPr lang="en-US" sz="1050" dirty="0"/>
+          </a:p>
+        </p:txBody>
+      </p:sp>
+      <p:sp>
+        <p:nvSpPr>
+          <p:cNvPr id="22" name="Shape 20"/>
           <p:cNvSpPr/>
           <p:nvPr/>
         </p:nvSpPr>
         <p:spPr>
           <a:xfrm>
-            <a:off x="548640" y="6492240"/>
-            <a:ext cx="11091672" cy="256032"/>
-          </a:xfrm>
-          <a:prstGeom prst="rect">
-            <a:avLst/>
-          </a:prstGeom>
-          <a:noFill/>
-          <a:ln/>
-        </p:spPr>
-        <p:txBody>
-          <a:bodyPr wrap="square" rtlCol="0" anchor="ctr"/>
-          <a:lstStyle/>
-          <a:p>
-            <a:pPr algn="l" indent="0" marL="0">
-              <a:buNone/>
-            </a:pPr>
-            <a:r>
-              <a:rPr lang="en-US" sz="950" dirty="0">
-                <a:solidFill>
-                  <a:srgbClr val="9AA6C4"/>
+            <a:off x="6231636" y="4343400"/>
+            <a:ext cx="5408676" cy="1417320"/>
+          </a:xfrm>
+          <a:prstGeom prst="roundRect">
+            <a:avLst>
+              <a:gd name="adj" fmla="val 5161"/>
+            </a:avLst>
+          </a:prstGeom>
+          <a:solidFill>
+            <a:srgbClr val="F4F7F9"/>
+          </a:solidFill>
+          <a:ln/>
+        </p:spPr>
+      </p:sp>
+      <p:sp>
+        <p:nvSpPr>
+          <p:cNvPr id="23" name="Shape 21"/>
+          <p:cNvSpPr/>
+          <p:nvPr/>
+        </p:nvSpPr>
+        <p:spPr>
+          <a:xfrm>
+            <a:off x="6432804" y="4526280"/>
+            <a:ext cx="329184" cy="329184"/>
+          </a:xfrm>
+          <a:prstGeom prst="oval">
+            <a:avLst/>
+          </a:prstGeom>
+          <a:solidFill>
+            <a:srgbClr val="EDA100"/>
+          </a:solidFill>
+          <a:ln/>
+        </p:spPr>
+      </p:sp>
+      <p:sp>
+        <p:nvSpPr>
+          <p:cNvPr id="24" name="Text 22"/>
+          <p:cNvSpPr txBox="1"/>
+          <p:nvPr/>
+        </p:nvSpPr>
+        <p:spPr>
+          <a:xfrm>
+            <a:off x="6432804" y="4526280"/>
+            <a:ext cx="329184" cy="329184"/>
+          </a:xfrm>
+          <a:prstGeom prst="rect">
+            <a:avLst/>
+          </a:prstGeom>
+          <a:noFill/>
+          <a:ln/>
+        </p:spPr>
+        <p:txBody>
+          <a:bodyPr wrap="square" lIns="0" tIns="0" rIns="0" bIns="0" rtlCol="0" anchor="ctr"/>
+          <a:lstStyle/>
+          <a:p>
+            <a:pPr algn="ctr" indent="0" marL="0">
+              <a:buNone/>
+            </a:pPr>
+            <a:r>
+              <a:rPr lang="en-US" sz="1200" b="1" dirty="0">
+                <a:solidFill>
+                  <a:srgbClr val="FFFFFF"/>
+                </a:solidFill>
+                <a:latin typeface="Cambria" pitchFamily="34" charset="0"/>
+                <a:ea typeface="Cambria" pitchFamily="34" charset="-122"/>
+                <a:cs typeface="Cambria" pitchFamily="34" charset="-120"/>
+              </a:rPr>
+              <a:t>④</a:t>
+            </a:r>
+            <a:endParaRPr lang="en-US" sz="1200" dirty="0"/>
+          </a:p>
+        </p:txBody>
+      </p:sp>
+      <p:sp>
+        <p:nvSpPr>
+          <p:cNvPr id="25" name="Text 23"/>
+          <p:cNvSpPr txBox="1"/>
+          <p:nvPr/>
+        </p:nvSpPr>
+        <p:spPr>
+          <a:xfrm>
+            <a:off x="6890004" y="4507992"/>
+            <a:ext cx="4539996" cy="310896"/>
+          </a:xfrm>
+          <a:prstGeom prst="rect">
+            <a:avLst/>
+          </a:prstGeom>
+          <a:noFill/>
+          <a:ln/>
+        </p:spPr>
+        <p:txBody>
+          <a:bodyPr wrap="square" lIns="0" tIns="0" rIns="0" bIns="0" rtlCol="0" anchor="ctr"/>
+          <a:lstStyle/>
+          <a:p>
+            <a:pPr indent="0" marL="0">
+              <a:buNone/>
+            </a:pPr>
+            <a:r>
+              <a:rPr lang="en-US" sz="1250" b="1" dirty="0">
+                <a:solidFill>
+                  <a:srgbClr val="21295C"/>
                 </a:solidFill>
                 <a:latin typeface="Calibri" pitchFamily="34" charset="0"/>
                 <a:ea typeface="Calibri" pitchFamily="34" charset="-122"/>
                 <a:cs typeface="Calibri" pitchFamily="34" charset="-120"/>
               </a:rPr>
-              <a:t>データ出典：14日間_for_AI.xlsx（FreeStyleリブレ連続血糖データ）／condition_app_2026-08-25_2026-09-07.xlsx</a:t>
-            </a:r>
-            <a:endParaRPr lang="en-US" sz="950" dirty="0"/>
+              <a:t>「爆発力」評価は間接指標の可能性</a:t>
+            </a:r>
+            <a:endParaRPr lang="en-US" sz="1250" dirty="0"/>
+          </a:p>
+        </p:txBody>
+      </p:sp>
+      <p:sp>
+        <p:nvSpPr>
+          <p:cNvPr id="26" name="Text 24"/>
+          <p:cNvSpPr txBox="1"/>
+          <p:nvPr/>
+        </p:nvSpPr>
+        <p:spPr>
+          <a:xfrm>
+            <a:off x="6432804" y="4910328"/>
+            <a:ext cx="4997196" cy="804672"/>
+          </a:xfrm>
+          <a:prstGeom prst="rect">
+            <a:avLst/>
+          </a:prstGeom>
+          <a:noFill/>
+          <a:ln/>
+        </p:spPr>
+        <p:txBody>
+          <a:bodyPr wrap="square" lIns="0" tIns="0" rIns="0" bIns="0" rtlCol="0" anchor="ctr"/>
+          <a:lstStyle/>
+          <a:p>
+            <a:pPr indent="0" marL="0">
+              <a:buNone/>
+            </a:pPr>
+            <a:r>
+              <a:rPr lang="en-US" sz="1050" dirty="0">
+                <a:solidFill>
+                  <a:srgbClr val="5C6570"/>
+                </a:solidFill>
+                <a:latin typeface="Calibri" pitchFamily="34" charset="0"/>
+                <a:ea typeface="Calibri" pitchFamily="34" charset="-122"/>
+                <a:cs typeface="Calibri" pitchFamily="34" charset="-120"/>
+              </a:rPr>
+              <a:t>瞬発力はATP-PCr系が主体で血糖に直接依存しにくい。血糖の安定＝生活リズムが整っている日、という間接的な心理指標である可能性が高い</a:t>
+            </a:r>
+            <a:endParaRPr lang="en-US" sz="1050" dirty="0"/>
+          </a:p>
+        </p:txBody>
+      </p:sp>
+      <p:sp>
+        <p:nvSpPr>
+          <p:cNvPr id="27" name="Shape 25"/>
+          <p:cNvSpPr/>
+          <p:nvPr/>
+        </p:nvSpPr>
+        <p:spPr>
+          <a:xfrm>
+            <a:off x="548640" y="5943600"/>
+            <a:ext cx="11091672" cy="731520"/>
+          </a:xfrm>
+          <a:prstGeom prst="roundRect">
+            <a:avLst>
+              <a:gd name="adj" fmla="val 12500"/>
+            </a:avLst>
+          </a:prstGeom>
+          <a:solidFill>
+            <a:srgbClr val="F4F7F9"/>
+          </a:solidFill>
+          <a:ln w="12700">
+            <a:solidFill>
+              <a:srgbClr val="1C7293"/>
+            </a:solidFill>
+            <a:prstDash val="solid"/>
+          </a:ln>
+        </p:spPr>
+      </p:sp>
+      <p:sp>
+        <p:nvSpPr>
+          <p:cNvPr id="28" name="Text 26"/>
+          <p:cNvSpPr txBox="1"/>
+          <p:nvPr/>
+        </p:nvSpPr>
+        <p:spPr>
+          <a:xfrm>
+            <a:off x="822960" y="6053328"/>
+            <a:ext cx="10543032" cy="512064"/>
+          </a:xfrm>
+          <a:prstGeom prst="rect">
+            <a:avLst/>
+          </a:prstGeom>
+          <a:noFill/>
+          <a:ln/>
+        </p:spPr>
+        <p:txBody>
+          <a:bodyPr wrap="square" lIns="0" tIns="0" rIns="0" bIns="0" rtlCol="0" anchor="ctr"/>
+          <a:lstStyle/>
+          <a:p>
+            <a:pPr indent="0" marL="0">
+              <a:buNone/>
+            </a:pPr>
+            <a:r>
+              <a:rPr lang="en-US" sz="1200" b="1" dirty="0">
+                <a:solidFill>
+                  <a:srgbClr val="21295C"/>
+                </a:solidFill>
+                <a:latin typeface="Calibri" pitchFamily="34" charset="0"/>
+                <a:ea typeface="Calibri" pitchFamily="34" charset="-122"/>
+                <a:cs typeface="Calibri" pitchFamily="34" charset="-120"/>
+              </a:rPr>
+              <a:t>結論：本データはあくまで相関（n=14）であり、因果関係を示すエビデンスではない。検証にはDAY5要因の特定後、条件を統制した再検証が必要。</a:t>
+            </a:r>
+            <a:endParaRPr lang="en-US" sz="1200" dirty="0"/>
           </a:p>
         </p:txBody>
       </p:sp>
